--- a/m4/diapositivos/aula-08-f10.pptx
+++ b/m4/diapositivos/aula-08-f10.pptx
@@ -11782,7 +11782,7 @@
         <p:spPr>
           <a:xfrm>
             <a:off x="1005840" y="2697480"/>
-            <a:ext cx="0" cy="1581912"/>
+            <a:ext cx="0" cy="1200912"/>
           </a:xfrm>
           <a:prstGeom prst="line">
             <a:avLst/>
@@ -11869,7 +11869,7 @@
         <p:spPr>
           <a:xfrm>
             <a:off x="1417320" y="2523744"/>
-            <a:ext cx="9174175" cy="981456"/>
+            <a:ext cx="9174175" cy="600456"/>
           </a:xfrm>
           <a:prstGeom prst="rect">
             <a:avLst/>
@@ -11898,7 +11898,7 @@
                 <a:ea typeface="Arial" pitchFamily="34" charset="-122"/>
                 <a:cs typeface="Arial" pitchFamily="34" charset="-120"/>
               </a:rPr>
-              <a:t>Não é inútil: a verdade fica dita, como António, que «não desistiu da doutrina»</a:t>
+              <a:t>Não é inútil: António «não desistiu da doutrina»</a:t>
             </a:r>
             <a:endParaRPr lang="en-US" sz="2400" dirty="0"/>
           </a:p>
@@ -11912,7 +11912,7 @@
         </p:nvSpPr>
         <p:spPr>
           <a:xfrm>
-            <a:off x="822960" y="3496056"/>
+            <a:off x="822960" y="3115056"/>
             <a:ext cx="365760" cy="365760"/>
           </a:xfrm>
           <a:prstGeom prst="ellipse">
@@ -11937,7 +11937,7 @@
         </p:nvSpPr>
         <p:spPr>
           <a:xfrm>
-            <a:off x="822960" y="3496056"/>
+            <a:off x="822960" y="3115056"/>
             <a:ext cx="365760" cy="365760"/>
           </a:xfrm>
           <a:prstGeom prst="rect">
@@ -11976,7 +11976,7 @@
         </p:nvSpPr>
         <p:spPr>
           <a:xfrm>
-            <a:off x="1417320" y="3505200"/>
+            <a:off x="1417320" y="3124200"/>
             <a:ext cx="9174175" cy="600456"/>
           </a:xfrm>
           <a:prstGeom prst="rect">
@@ -12006,7 +12006,7 @@
                 <a:ea typeface="Arial" pitchFamily="34" charset="-122"/>
                 <a:cs typeface="Arial" pitchFamily="34" charset="-120"/>
               </a:rPr>
-              <a:t>Vieira era padre: tinha de pregar</a:t>
+              <a:t>Vieira era padre e, por isso, tinha de pregar</a:t>
             </a:r>
             <a:endParaRPr lang="en-US" sz="2400" dirty="0"/>
           </a:p>
@@ -12020,7 +12020,7 @@
         </p:nvSpPr>
         <p:spPr>
           <a:xfrm>
-            <a:off x="822960" y="4096512"/>
+            <a:off x="822960" y="3715512"/>
             <a:ext cx="365760" cy="365760"/>
           </a:xfrm>
           <a:prstGeom prst="ellipse">
@@ -12045,7 +12045,7 @@
         </p:nvSpPr>
         <p:spPr>
           <a:xfrm>
-            <a:off x="822960" y="4096512"/>
+            <a:off x="822960" y="3715512"/>
             <a:ext cx="365760" cy="365760"/>
           </a:xfrm>
           <a:prstGeom prst="rect">
@@ -12084,7 +12084,7 @@
         </p:nvSpPr>
         <p:spPr>
           <a:xfrm>
-            <a:off x="1417320" y="4105656"/>
+            <a:off x="1417320" y="3724656"/>
             <a:ext cx="9174175" cy="600456"/>
           </a:xfrm>
           <a:prstGeom prst="rect">
@@ -12114,7 +12114,7 @@
                 <a:ea typeface="Arial" pitchFamily="34" charset="-122"/>
                 <a:cs typeface="Arial" pitchFamily="34" charset="-120"/>
               </a:rPr>
-              <a:t>É a minha opinião, e cada um tem a sua</a:t>
+              <a:t>É a minha opinião, e cada um tem direito à sua</a:t>
             </a:r>
             <a:endParaRPr lang="en-US" sz="2400" dirty="0"/>
           </a:p>
@@ -12365,7 +12365,7 @@
                 <a:ea typeface="Arial" pitchFamily="34" charset="-122"/>
                 <a:cs typeface="Arial" pitchFamily="34" charset="-120"/>
               </a:rPr>
-              <a:t>Não é inútil: a verdade fica dita, como António, que «não desistiu da doutrina»</a:t>
+              <a:t>Não é inútil: António «não desistiu da doutrina»</a:t>
             </a:r>
             <a:endParaRPr lang="en-US" sz="3400" dirty="0"/>
           </a:p>
